--- a/과제정의서.pptx
+++ b/과제정의서.pptx
@@ -211,7 +211,7 @@
           <a:p>
             <a:fld id="{CCD26DCF-1716-484D-9C58-882373CAEEA5}" type="datetimeFigureOut">
               <a:rPr lang="ko-KR" altLang="en-US" smtClean="0"/>
-              <a:t>2026. 4. 16.</a:t>
+              <a:t>2026. 5. 29.</a:t>
             </a:fld>
             <a:endParaRPr lang="ko-KR" altLang="en-US"/>
           </a:p>
@@ -1428,7 +1428,7 @@
           <a:p>
             <a:fld id="{8EF495C4-D990-47E5-87EB-7F0830E8B335}" type="datetimeFigureOut">
               <a:rPr lang="ko-KR" altLang="en-US" smtClean="0"/>
-              <a:t>2026. 4. 16.</a:t>
+              <a:t>2026. 5. 29.</a:t>
             </a:fld>
             <a:endParaRPr lang="ko-KR" altLang="en-US"/>
           </a:p>
@@ -1639,7 +1639,7 @@
           <a:p>
             <a:fld id="{8EF495C4-D990-47E5-87EB-7F0830E8B335}" type="datetimeFigureOut">
               <a:rPr lang="ko-KR" altLang="en-US" smtClean="0"/>
-              <a:t>2026. 4. 16.</a:t>
+              <a:t>2026. 5. 29.</a:t>
             </a:fld>
             <a:endParaRPr lang="ko-KR" altLang="en-US"/>
           </a:p>
@@ -1845,7 +1845,7 @@
           <a:p>
             <a:fld id="{8EF495C4-D990-47E5-87EB-7F0830E8B335}" type="datetimeFigureOut">
               <a:rPr lang="ko-KR" altLang="en-US" smtClean="0"/>
-              <a:t>2026. 4. 16.</a:t>
+              <a:t>2026. 5. 29.</a:t>
             </a:fld>
             <a:endParaRPr lang="ko-KR" altLang="en-US"/>
           </a:p>
@@ -2139,7 +2139,7 @@
           <a:p>
             <a:fld id="{8EF495C4-D990-47E5-87EB-7F0830E8B335}" type="datetimeFigureOut">
               <a:rPr lang="ko-KR" altLang="en-US" smtClean="0"/>
-              <a:t>2026. 4. 16.</a:t>
+              <a:t>2026. 5. 29.</a:t>
             </a:fld>
             <a:endParaRPr lang="ko-KR" altLang="en-US"/>
           </a:p>
@@ -2412,7 +2412,7 @@
           <a:p>
             <a:fld id="{8EF495C4-D990-47E5-87EB-7F0830E8B335}" type="datetimeFigureOut">
               <a:rPr lang="ko-KR" altLang="en-US" smtClean="0"/>
-              <a:t>2026. 4. 16.</a:t>
+              <a:t>2026. 5. 29.</a:t>
             </a:fld>
             <a:endParaRPr lang="ko-KR" altLang="en-US"/>
           </a:p>
@@ -2827,7 +2827,7 @@
           <a:p>
             <a:fld id="{8EF495C4-D990-47E5-87EB-7F0830E8B335}" type="datetimeFigureOut">
               <a:rPr lang="ko-KR" altLang="en-US" smtClean="0"/>
-              <a:t>2026. 4. 16.</a:t>
+              <a:t>2026. 5. 29.</a:t>
             </a:fld>
             <a:endParaRPr lang="ko-KR" altLang="en-US"/>
           </a:p>
@@ -2976,7 +2976,7 @@
           <a:p>
             <a:fld id="{8EF495C4-D990-47E5-87EB-7F0830E8B335}" type="datetimeFigureOut">
               <a:rPr lang="ko-KR" altLang="en-US" smtClean="0"/>
-              <a:t>2026. 4. 16.</a:t>
+              <a:t>2026. 5. 29.</a:t>
             </a:fld>
             <a:endParaRPr lang="ko-KR" altLang="en-US"/>
           </a:p>
@@ -3089,7 +3089,7 @@
           <a:p>
             <a:fld id="{8EF495C4-D990-47E5-87EB-7F0830E8B335}" type="datetimeFigureOut">
               <a:rPr lang="ko-KR" altLang="en-US" smtClean="0"/>
-              <a:t>2026. 4. 16.</a:t>
+              <a:t>2026. 5. 29.</a:t>
             </a:fld>
             <a:endParaRPr lang="ko-KR" altLang="en-US"/>
           </a:p>
@@ -3403,7 +3403,7 @@
           <a:p>
             <a:fld id="{8EF495C4-D990-47E5-87EB-7F0830E8B335}" type="datetimeFigureOut">
               <a:rPr lang="ko-KR" altLang="en-US" smtClean="0"/>
-              <a:t>2026. 4. 16.</a:t>
+              <a:t>2026. 5. 29.</a:t>
             </a:fld>
             <a:endParaRPr lang="ko-KR" altLang="en-US"/>
           </a:p>
@@ -3694,7 +3694,7 @@
           <a:p>
             <a:fld id="{8EF495C4-D990-47E5-87EB-7F0830E8B335}" type="datetimeFigureOut">
               <a:rPr lang="ko-KR" altLang="en-US" smtClean="0"/>
-              <a:t>2026. 4. 16.</a:t>
+              <a:t>2026. 5. 29.</a:t>
             </a:fld>
             <a:endParaRPr lang="ko-KR" altLang="en-US"/>
           </a:p>
@@ -3900,7 +3900,7 @@
           <a:p>
             <a:fld id="{8EF495C4-D990-47E5-87EB-7F0830E8B335}" type="datetimeFigureOut">
               <a:rPr lang="ko-KR" altLang="en-US" smtClean="0"/>
-              <a:t>2026. 4. 16.</a:t>
+              <a:t>2026. 5. 29.</a:t>
             </a:fld>
             <a:endParaRPr lang="ko-KR" altLang="en-US"/>
           </a:p>
@@ -4383,237 +4383,171 @@
           <a:lstStyle/>
           <a:p>
             <a:r>
-              <a:rPr lang="en-US" altLang="ko-KR" sz="1100" b="1" dirty="0"/>
-              <a:t>① </a:t>
-            </a:r>
-            <a:r>
-              <a:rPr lang="ko-KR" altLang="en-US" sz="1100" b="1" dirty="0"/>
-              <a:t>업무 프로세스 흐름</a:t>
+              <a:rPr lang="ko-KR" altLang="ko-KR" sz="1100" b="1" dirty="0"/>
+              <a:t>① 업무 프로세스 흐름</a:t>
             </a:r>
             <a:endParaRPr lang="en-US" altLang="ko-KR" sz="1100" b="1" dirty="0"/>
           </a:p>
           <a:p>
             <a:r>
-              <a:rPr lang="en-US" altLang="ko-KR" sz="1100" b="1" dirty="0"/>
+              <a:rPr lang="en-US" altLang="ko-KR" sz="1100" dirty="0"/>
               <a:t>:</a:t>
             </a:r>
             <a:r>
-              <a:rPr lang="ko-KR" altLang="en-US" sz="1100" b="1" dirty="0"/>
+              <a:rPr lang="ko-KR" altLang="en-US" sz="1100" dirty="0"/>
               <a:t> </a:t>
             </a:r>
             <a:r>
+              <a:rPr lang="ko-KR" altLang="ko-KR" sz="1100" dirty="0"/>
+              <a:t>기자 정보 수집 → 기자 기사 검색 및 열람 → 관심 분야 및 기사 성향 분석 → 관련 기사 정리 → 미팅 및 인터뷰 대응자료 작성 → 대외 커뮤니케이션 수행</a:t>
+            </a:r>
+          </a:p>
+          <a:p>
+            <a:endParaRPr lang="en-US" altLang="ko-KR" sz="1100" b="1" dirty="0"/>
+          </a:p>
+          <a:p>
+            <a:r>
+              <a:rPr lang="ko-KR" altLang="ko-KR" sz="1100" b="1" dirty="0"/>
+              <a:t>② </a:t>
+            </a:r>
+            <a:r>
+              <a:rPr lang="ko-KR" altLang="ko-KR" sz="1100" b="1" dirty="0" err="1"/>
+              <a:t>Pain</a:t>
+            </a:r>
+            <a:r>
+              <a:rPr lang="ko-KR" altLang="ko-KR" sz="1100" b="1" dirty="0"/>
+              <a:t> </a:t>
+            </a:r>
+            <a:r>
+              <a:rPr lang="ko-KR" altLang="ko-KR" sz="1100" b="1" dirty="0" err="1"/>
+              <a:t>Point</a:t>
+            </a:r>
+            <a:endParaRPr lang="ko-KR" altLang="ko-KR" sz="1100" b="1" dirty="0"/>
+          </a:p>
+          <a:p>
+            <a:r>
               <a:rPr lang="ko-KR" altLang="en-US" sz="1100" dirty="0"/>
-              <a:t>뉴스 포털</a:t>
+              <a:t> </a:t>
             </a:r>
             <a:r>
               <a:rPr lang="en-US" altLang="ko-KR" sz="1100" dirty="0"/>
-              <a:t>(</a:t>
+              <a:t>-</a:t>
             </a:r>
             <a:r>
               <a:rPr lang="ko-KR" altLang="en-US" sz="1100" dirty="0"/>
-              <a:t>네이버 등</a:t>
+              <a:t> </a:t>
+            </a:r>
+            <a:r>
+              <a:rPr lang="ko-KR" altLang="ko-KR" sz="1100" dirty="0"/>
+              <a:t>기자 정보를 다양한 사이트에서 개별적으로</a:t>
             </a:r>
             <a:r>
               <a:rPr lang="en-US" altLang="ko-KR" sz="1100" dirty="0"/>
-              <a:t>) </a:t>
-            </a:r>
+              <a:t>. </a:t>
+            </a:r>
+            <a:r>
+              <a:rPr lang="ko-KR" altLang="ko-KR" sz="1100" dirty="0"/>
+              <a:t>검색하여 업무 시간이 과다 소요됨</a:t>
+            </a:r>
+          </a:p>
+          <a:p>
             <a:r>
               <a:rPr lang="ko-KR" altLang="en-US" sz="1100" dirty="0"/>
-              <a:t>수동 검색 → 기사 개별 열람 및 선별 → 엑셀</a:t>
+              <a:t> </a:t>
             </a:r>
             <a:r>
               <a:rPr lang="en-US" altLang="ko-KR" sz="1100" dirty="0"/>
-              <a:t>/</a:t>
+              <a:t>-</a:t>
             </a:r>
             <a:r>
               <a:rPr lang="ko-KR" altLang="en-US" sz="1100" dirty="0"/>
-              <a:t>문서로 기사 정리 → 수작업 요약 및 </a:t>
-            </a:r>
-            <a:r>
-              <a:rPr lang="ko-KR" altLang="en-US" sz="1100" dirty="0" err="1"/>
-              <a:t>긍</a:t>
+              <a:t> </a:t>
+            </a:r>
+            <a:r>
+              <a:rPr lang="ko-KR" altLang="ko-KR" sz="1100" dirty="0"/>
+              <a:t>기자 관심사 및 기사 성향 분석이 담당자 경험에 의존함</a:t>
+            </a:r>
+          </a:p>
+          <a:p>
+            <a:r>
+              <a:rPr lang="ko-KR" altLang="en-US" sz="1100" dirty="0"/>
+              <a:t> </a:t>
             </a:r>
             <a:r>
               <a:rPr lang="en-US" altLang="ko-KR" sz="1100" dirty="0"/>
-              <a:t>·</a:t>
+              <a:t>-</a:t>
             </a:r>
             <a:r>
               <a:rPr lang="ko-KR" altLang="en-US" sz="1100" dirty="0"/>
-              <a:t>부정 판단 → 보고서 작성 및 공유</a:t>
-            </a:r>
-          </a:p>
-          <a:p>
-            <a:endParaRPr lang="ko-KR" altLang="en-US" sz="1100" dirty="0"/>
-          </a:p>
-          <a:p>
-            <a:r>
-              <a:rPr lang="en-US" altLang="ko-KR" sz="1100" b="1" dirty="0"/>
-              <a:t>② </a:t>
-            </a:r>
-            <a:r>
-              <a:rPr lang="ko-KR" altLang="en-US" sz="1100" b="1" dirty="0"/>
-              <a:t>주요 </a:t>
-            </a:r>
-            <a:r>
-              <a:rPr lang="en-US" altLang="ko-KR" sz="1100" b="1" dirty="0"/>
-              <a:t>Activity</a:t>
-            </a:r>
-          </a:p>
-          <a:p>
-            <a:pPr marL="171450" indent="-171450">
-              <a:buFontTx/>
-              <a:buChar char="-"/>
-            </a:pPr>
+              <a:t> </a:t>
+            </a:r>
+            <a:r>
+              <a:rPr lang="ko-KR" altLang="ko-KR" sz="1100" dirty="0" err="1"/>
+              <a:t>기자별</a:t>
+            </a:r>
+            <a:r>
+              <a:rPr lang="ko-KR" altLang="ko-KR" sz="1100" dirty="0"/>
+              <a:t> 최신 관심 이슈를 실시간으로 파악하기 어려움</a:t>
+            </a:r>
+          </a:p>
+          <a:p>
             <a:r>
               <a:rPr lang="ko-KR" altLang="en-US" sz="1100" dirty="0"/>
-              <a:t>키워드별 기사 검색 및 스크랩</a:t>
-            </a:r>
-            <a:endParaRPr lang="en-US" altLang="ko-KR" sz="1100" dirty="0"/>
-          </a:p>
-          <a:p>
-            <a:pPr marL="171450" indent="-171450">
-              <a:buFontTx/>
-              <a:buChar char="-"/>
-            </a:pPr>
+              <a:t> </a:t>
+            </a:r>
+            <a:r>
+              <a:rPr lang="en-US" altLang="ko-KR" sz="1100" dirty="0"/>
+              <a:t>-</a:t>
+            </a:r>
             <a:r>
               <a:rPr lang="ko-KR" altLang="en-US" sz="1100" dirty="0"/>
-              <a:t>기사 내용 요약 및 분류</a:t>
-            </a:r>
-            <a:endParaRPr lang="en-US" altLang="ko-KR" sz="1100" dirty="0"/>
-          </a:p>
-          <a:p>
-            <a:pPr marL="171450" indent="-171450">
-              <a:buFontTx/>
-              <a:buChar char="-"/>
-            </a:pPr>
+              <a:t> </a:t>
+            </a:r>
+            <a:r>
+              <a:rPr lang="ko-KR" altLang="ko-KR" sz="1100" dirty="0"/>
+              <a:t>사업회사별 대응 메시지 작성 시 관련 자료 탐색에 많은 시간이 필요함</a:t>
+            </a:r>
+          </a:p>
+          <a:p>
             <a:r>
               <a:rPr lang="ko-KR" altLang="en-US" sz="1100" dirty="0"/>
-              <a:t>주요 인사 발언 및 이슈 수집</a:t>
-            </a:r>
-            <a:endParaRPr lang="en-US" altLang="ko-KR" sz="1100" dirty="0"/>
-          </a:p>
-          <a:p>
-            <a:pPr marL="171450" indent="-171450">
-              <a:buFontTx/>
-              <a:buChar char="-"/>
-            </a:pPr>
+              <a:t> </a:t>
+            </a:r>
+            <a:r>
+              <a:rPr lang="en-US" altLang="ko-KR" sz="1100" dirty="0"/>
+              <a:t>-</a:t>
+            </a:r>
             <a:r>
               <a:rPr lang="ko-KR" altLang="en-US" sz="1100" dirty="0"/>
-              <a:t>중대재해 및 리스크 사례 조사</a:t>
-            </a:r>
-          </a:p>
-          <a:p>
-            <a:endParaRPr lang="ko-KR" altLang="en-US" sz="1100" dirty="0"/>
-          </a:p>
-          <a:p>
-            <a:r>
-              <a:rPr lang="en-US" altLang="ko-KR" sz="1100" b="1" dirty="0"/>
-              <a:t>③ Pain Point</a:t>
-            </a:r>
-          </a:p>
-          <a:p>
-            <a:pPr marL="171450" indent="-171450">
-              <a:buFontTx/>
-              <a:buChar char="-"/>
-            </a:pPr>
+              <a:t> </a:t>
+            </a:r>
+            <a:r>
+              <a:rPr lang="ko-KR" altLang="ko-KR" sz="1100" dirty="0"/>
+              <a:t>반복적인 기사 검색 및 분석 업무로 전략적 홍보 활동에 집중하기 어려움</a:t>
+            </a:r>
+          </a:p>
+          <a:p>
             <a:r>
               <a:rPr lang="ko-KR" altLang="en-US" sz="1100" dirty="0"/>
-              <a:t>실시간 데이터 확보 어려움 </a:t>
+              <a:t> </a:t>
             </a:r>
             <a:r>
               <a:rPr lang="en-US" altLang="ko-KR" sz="1100" dirty="0"/>
-              <a:t>(</a:t>
+              <a:t>-</a:t>
             </a:r>
             <a:r>
               <a:rPr lang="ko-KR" altLang="en-US" sz="1100" dirty="0"/>
-              <a:t>사내 </a:t>
-            </a:r>
-            <a:r>
-              <a:rPr lang="en-US" altLang="ko-KR" sz="1100" dirty="0"/>
-              <a:t>GPT </a:t>
-            </a:r>
-            <a:r>
-              <a:rPr lang="ko-KR" altLang="en-US" sz="1100" dirty="0" err="1"/>
-              <a:t>크롤링</a:t>
+              <a:t> </a:t>
+            </a:r>
+            <a:r>
+              <a:rPr lang="ko-KR" altLang="ko-KR" sz="1100" dirty="0"/>
+              <a:t>담당자별 분석 수준 차이</a:t>
             </a:r>
             <a:r>
               <a:rPr lang="ko-KR" altLang="en-US" sz="1100" dirty="0"/>
-              <a:t> 한계</a:t>
-            </a:r>
-            <a:r>
-              <a:rPr lang="en-US" altLang="ko-KR" sz="1100" dirty="0"/>
-              <a:t>)</a:t>
-            </a:r>
-          </a:p>
-          <a:p>
-            <a:pPr marL="171450" indent="-171450">
-              <a:buFontTx/>
-              <a:buChar char="-"/>
-            </a:pPr>
-            <a:r>
-              <a:rPr lang="ko-KR" altLang="en-US" sz="1100" dirty="0"/>
-              <a:t>하루 수백 건 기사 수작업 처리로 인한 과도한 업무 부담</a:t>
-            </a:r>
-            <a:endParaRPr lang="en-US" altLang="ko-KR" sz="1100" dirty="0"/>
-          </a:p>
-          <a:p>
-            <a:pPr marL="171450" indent="-171450">
-              <a:buFontTx/>
-              <a:buChar char="-"/>
-            </a:pPr>
-            <a:r>
-              <a:rPr lang="ko-KR" altLang="en-US" sz="1100" dirty="0"/>
-              <a:t>사업회사별 개별 </a:t>
-            </a:r>
-            <a:r>
-              <a:rPr lang="en-US" altLang="ko-KR" sz="1100" dirty="0"/>
-              <a:t>AI </a:t>
-            </a:r>
-            <a:r>
-              <a:rPr lang="ko-KR" altLang="en-US" sz="1100" dirty="0"/>
-              <a:t>툴 개발로 중복 투자 발생</a:t>
-            </a:r>
-            <a:endParaRPr lang="en-US" altLang="ko-KR" sz="1100" dirty="0"/>
-          </a:p>
-          <a:p>
-            <a:pPr marL="171450" indent="-171450">
-              <a:buFontTx/>
-              <a:buChar char="-"/>
-            </a:pPr>
-            <a:r>
-              <a:rPr lang="ko-KR" altLang="en-US" sz="1100" dirty="0"/>
-              <a:t>외부 생성형 </a:t>
-            </a:r>
-            <a:r>
-              <a:rPr lang="en-US" altLang="ko-KR" sz="1100" dirty="0"/>
-              <a:t>AI </a:t>
-            </a:r>
-            <a:r>
-              <a:rPr lang="ko-KR" altLang="en-US" sz="1100" dirty="0"/>
-              <a:t>활용 시 토큰 비용 및 보안 이슈 존재</a:t>
-            </a:r>
-            <a:endParaRPr lang="en-US" altLang="ko-KR" sz="1100" dirty="0"/>
-          </a:p>
-          <a:p>
-            <a:pPr marL="171450" indent="-171450">
-              <a:buFontTx/>
-              <a:buChar char="-"/>
-            </a:pPr>
-            <a:r>
-              <a:rPr lang="ko-KR" altLang="en-US" sz="1100" dirty="0"/>
-              <a:t>인링크 기사 중심 수집으로 데이터 편향 발생</a:t>
-            </a:r>
-            <a:endParaRPr lang="en-US" altLang="ko-KR" sz="1100" dirty="0"/>
-          </a:p>
-          <a:p>
-            <a:pPr marL="171450" indent="-171450">
-              <a:buFontTx/>
-              <a:buChar char="-"/>
-            </a:pPr>
-            <a:r>
-              <a:rPr lang="ko-KR" altLang="en-US" sz="1100" dirty="0"/>
-              <a:t>개별 시스템의 낮은 활용성 및 확장성 한계</a:t>
-            </a:r>
+              <a:t> 발생</a:t>
+            </a:r>
+            <a:endParaRPr lang="ko-KR" altLang="ko-KR" sz="1100" dirty="0"/>
           </a:p>
         </p:txBody>
       </p:sp>
@@ -4661,21 +4595,24 @@
           <a:lstStyle/>
           <a:p>
             <a:pPr>
-              <a:defRPr/>
+              <a:buNone/>
             </a:pPr>
             <a:r>
-              <a:rPr lang="en-US" altLang="ko-KR" sz="1100" b="1" dirty="0"/>
-              <a:t>① Agent </a:t>
-            </a:r>
-            <a:r>
-              <a:rPr lang="ko-KR" altLang="en-US" sz="1100" b="1" dirty="0"/>
-              <a:t>기반 업무 프로세스</a:t>
-            </a:r>
-            <a:endParaRPr lang="en-US" altLang="ko-KR" sz="1100" b="1" dirty="0"/>
+              <a:rPr lang="ko-KR" altLang="ko-KR" sz="1100" b="1" dirty="0"/>
+              <a:t>① </a:t>
+            </a:r>
+            <a:r>
+              <a:rPr lang="ko-KR" altLang="ko-KR" sz="1100" b="1" dirty="0" err="1"/>
+              <a:t>Agent</a:t>
+            </a:r>
+            <a:r>
+              <a:rPr lang="ko-KR" altLang="ko-KR" sz="1100" b="1" dirty="0"/>
+              <a:t> 기반 업무 프로세스</a:t>
+            </a:r>
           </a:p>
           <a:p>
             <a:pPr>
-              <a:defRPr/>
+              <a:buNone/>
             </a:pPr>
             <a:r>
               <a:rPr lang="en-US" altLang="ko-KR" sz="1100" dirty="0"/>
@@ -4686,12 +4623,86 @@
               <a:t> </a:t>
             </a:r>
             <a:r>
-              <a:rPr lang="en-US" altLang="ko-KR" sz="1100" dirty="0"/>
-              <a:t>API </a:t>
-            </a:r>
+              <a:rPr lang="ko-KR" altLang="ko-KR" sz="1100" dirty="0" err="1"/>
+              <a:t>기자명·매체명</a:t>
+            </a:r>
+            <a:r>
+              <a:rPr lang="ko-KR" altLang="ko-KR" sz="1100" dirty="0"/>
+              <a:t> 입력 → 뉴스 API 기반 기사 자동 수집 → AI 기반 </a:t>
+            </a:r>
+            <a:r>
+              <a:rPr lang="ko-KR" altLang="ko-KR" sz="1100" dirty="0" err="1"/>
+              <a:t>관심사·논조</a:t>
+            </a:r>
+            <a:r>
+              <a:rPr lang="ko-KR" altLang="ko-KR" sz="1100" dirty="0"/>
+              <a:t> 분석 → </a:t>
+            </a:r>
+            <a:r>
+              <a:rPr lang="ko-KR" altLang="ko-KR" sz="1100" dirty="0" err="1"/>
+              <a:t>포스코그룹</a:t>
+            </a:r>
+            <a:r>
+              <a:rPr lang="ko-KR" altLang="ko-KR" sz="1100" dirty="0"/>
+              <a:t> 관련 기사 자동 매핑 → 사업회사별 </a:t>
+            </a:r>
+            <a:r>
+              <a:rPr lang="ko-KR" altLang="ko-KR" sz="1100" dirty="0" err="1"/>
+              <a:t>토킹포인트</a:t>
+            </a:r>
+            <a:r>
+              <a:rPr lang="ko-KR" altLang="ko-KR" sz="1100" dirty="0"/>
+              <a:t> 생성 → </a:t>
+            </a:r>
+            <a:r>
+              <a:rPr lang="ko-KR" altLang="ko-KR" sz="1100" dirty="0" err="1"/>
+              <a:t>웹앱</a:t>
+            </a:r>
+            <a:r>
+              <a:rPr lang="ko-KR" altLang="ko-KR" sz="1100" dirty="0"/>
+              <a:t> 기반 결과 제공(</a:t>
+            </a:r>
+            <a:r>
+              <a:rPr lang="ko-KR" altLang="ko-KR" sz="1100" dirty="0" err="1"/>
+              <a:t>PC·모바일</a:t>
+            </a:r>
+            <a:r>
+              <a:rPr lang="ko-KR" altLang="ko-KR" sz="1100" dirty="0"/>
+              <a:t>)</a:t>
+            </a:r>
+          </a:p>
+          <a:p>
+            <a:pPr>
+              <a:buNone/>
+            </a:pPr>
+            <a:endParaRPr lang="en-US" altLang="ko-KR" sz="1100" b="1" dirty="0"/>
+          </a:p>
+          <a:p>
+            <a:pPr>
+              <a:buNone/>
+            </a:pPr>
+            <a:r>
+              <a:rPr lang="ko-KR" altLang="ko-KR" sz="1100" b="1" dirty="0"/>
+              <a:t>② 주요</a:t>
+            </a:r>
+            <a:r>
+              <a:rPr lang="ko-KR" altLang="en-US" sz="1100" b="1" dirty="0"/>
+              <a:t> 개발 내용</a:t>
+            </a:r>
+            <a:endParaRPr lang="ko-KR" altLang="ko-KR" sz="1100" b="1" dirty="0"/>
+          </a:p>
+          <a:p>
             <a:r>
               <a:rPr lang="ko-KR" altLang="en-US" sz="1100" dirty="0"/>
-              <a:t>연동 자동 기사 수집 → </a:t>
+              <a:t> </a:t>
+            </a:r>
+            <a:r>
+              <a:rPr lang="ko-KR" altLang="en-US" sz="1100" dirty="0" err="1"/>
+              <a:t>포스코그룹</a:t>
+            </a:r>
+            <a:r>
+              <a:rPr lang="ko-KR" altLang="en-US" sz="1100" dirty="0"/>
+              <a:t> 대외 홍보 부서가 업무에 실질적으로 활용 가능한 그룹 공통 </a:t>
             </a:r>
             <a:r>
               <a:rPr lang="en-US" altLang="ko-KR" sz="1100" dirty="0"/>
@@ -4699,347 +4710,128 @@
             </a:r>
             <a:r>
               <a:rPr lang="ko-KR" altLang="en-US" sz="1100" dirty="0"/>
-              <a:t>기반 분석 및 중요도 분류 → 키워드별 이슈 클러스터링 및 인사이트 도출 → 주요 인사</a:t>
-            </a:r>
-            <a:r>
-              <a:rPr lang="en-US" altLang="ko-KR" sz="1100" dirty="0"/>
-              <a:t>/</a:t>
-            </a:r>
-            <a:r>
-              <a:rPr lang="ko-KR" altLang="en-US" sz="1100" dirty="0"/>
-              <a:t>언론인 발언 자동 추출 → 리스크</a:t>
-            </a:r>
-            <a:r>
-              <a:rPr lang="en-US" altLang="ko-KR" sz="1100" dirty="0"/>
-              <a:t>(</a:t>
-            </a:r>
-            <a:r>
-              <a:rPr lang="ko-KR" altLang="en-US" sz="1100" dirty="0"/>
-              <a:t>중대재해 등</a:t>
-            </a:r>
-            <a:r>
-              <a:rPr lang="en-US" altLang="ko-KR" sz="1100" dirty="0"/>
-              <a:t>) </a:t>
-            </a:r>
-            <a:r>
-              <a:rPr lang="ko-KR" altLang="en-US" sz="1100" dirty="0"/>
-              <a:t>탐지 및 알림 → 자동 보고서 생성 및 대시보드 제공</a:t>
-            </a:r>
-            <a:endParaRPr lang="en-US" altLang="ko-KR" sz="1100" dirty="0"/>
-          </a:p>
-          <a:p>
-            <a:r>
-              <a:rPr lang="ko-KR" altLang="en-US" sz="1100" dirty="0"/>
-              <a:t> </a:t>
-            </a:r>
-            <a:r>
-              <a:rPr lang="en-US" altLang="ko-KR" sz="1100" dirty="0"/>
-              <a:t>-</a:t>
-            </a:r>
-            <a:r>
-              <a:rPr lang="ko-KR" altLang="en-US" sz="1100" dirty="0"/>
-              <a:t> 미디어 </a:t>
-            </a:r>
-            <a:r>
-              <a:rPr lang="ko-KR" altLang="en-US" sz="1100" dirty="0" err="1"/>
-              <a:t>인텔리전스</a:t>
-            </a:r>
-            <a:r>
-              <a:rPr lang="en-US" altLang="ko-KR" sz="1100" dirty="0"/>
-              <a:t>(</a:t>
-            </a:r>
-            <a:r>
-              <a:rPr lang="ko-KR" altLang="en-US" sz="1100" dirty="0"/>
-              <a:t>기자 관심사</a:t>
-            </a:r>
-            <a:r>
-              <a:rPr lang="en-US" altLang="ko-KR" sz="1100" dirty="0"/>
-              <a:t>, </a:t>
-            </a:r>
-            <a:r>
-              <a:rPr lang="ko-KR" altLang="en-US" sz="1100" dirty="0"/>
-              <a:t>기사 기반 소통 가이드 등</a:t>
-            </a:r>
-            <a:r>
-              <a:rPr lang="en-US" altLang="ko-KR" sz="1100" dirty="0"/>
-              <a:t>)</a:t>
-            </a:r>
-            <a:endParaRPr lang="ko-KR" altLang="en-US" sz="1100" dirty="0"/>
-          </a:p>
-          <a:p>
-            <a:r>
-              <a:rPr lang="ko-KR" altLang="en-US" sz="1100" dirty="0"/>
-              <a:t> </a:t>
-            </a:r>
-            <a:r>
-              <a:rPr lang="en-US" altLang="ko-KR" sz="1100" dirty="0"/>
-              <a:t>-</a:t>
-            </a:r>
-            <a:r>
-              <a:rPr lang="ko-KR" altLang="en-US" sz="1100" dirty="0"/>
-              <a:t> 위기대응 지식창고</a:t>
-            </a:r>
-            <a:r>
-              <a:rPr lang="en-US" altLang="ko-KR" sz="1100" dirty="0"/>
-              <a:t>(</a:t>
-            </a:r>
-            <a:r>
-              <a:rPr lang="ko-KR" altLang="en-US" sz="1100" dirty="0"/>
-              <a:t>주요 인사 발언</a:t>
-            </a:r>
-            <a:r>
-              <a:rPr lang="en-US" altLang="ko-KR" sz="1100" dirty="0"/>
-              <a:t>, </a:t>
-            </a:r>
-            <a:r>
-              <a:rPr lang="ko-KR" altLang="en-US" sz="1100" dirty="0"/>
-              <a:t>중대재해 사례</a:t>
-            </a:r>
-            <a:r>
-              <a:rPr lang="en-US" altLang="ko-KR" sz="1100" dirty="0"/>
-              <a:t>, </a:t>
-            </a:r>
-            <a:r>
-              <a:rPr lang="ko-KR" altLang="en-US" sz="1100" dirty="0"/>
-              <a:t>사과문 등</a:t>
-            </a:r>
-            <a:r>
-              <a:rPr lang="en-US" altLang="ko-KR" sz="1100" dirty="0"/>
-              <a:t>)</a:t>
-            </a:r>
-          </a:p>
-          <a:p>
-            <a:r>
-              <a:rPr lang="ko-KR" altLang="en-US" sz="1100" dirty="0"/>
-              <a:t> </a:t>
-            </a:r>
-            <a:r>
-              <a:rPr lang="en-US" altLang="ko-KR" sz="1100" dirty="0"/>
-              <a:t>-</a:t>
-            </a:r>
-            <a:r>
-              <a:rPr lang="ko-KR" altLang="en-US" sz="1100" dirty="0"/>
-              <a:t> 이슈 분석</a:t>
-            </a:r>
-            <a:r>
-              <a:rPr lang="en-US" altLang="ko-KR" sz="1100" dirty="0"/>
-              <a:t>(</a:t>
-            </a:r>
-            <a:r>
-              <a:rPr lang="ko-KR" altLang="en-US" sz="1100" dirty="0"/>
-              <a:t>이슈 핵심 요약</a:t>
-            </a:r>
-            <a:r>
-              <a:rPr lang="en-US" altLang="ko-KR" sz="1100" dirty="0"/>
-              <a:t>, </a:t>
-            </a:r>
-            <a:r>
-              <a:rPr lang="ko-KR" altLang="en-US" sz="1100" dirty="0"/>
-              <a:t>매체별 논조</a:t>
-            </a:r>
-            <a:r>
-              <a:rPr lang="en-US" altLang="ko-KR" sz="1100" dirty="0"/>
-              <a:t>, </a:t>
-            </a:r>
-            <a:r>
-              <a:rPr lang="ko-KR" altLang="en-US" sz="1100" dirty="0"/>
-              <a:t>그룹 시사점 등</a:t>
-            </a:r>
-            <a:r>
-              <a:rPr lang="en-US" altLang="ko-KR" sz="1100" dirty="0"/>
-              <a:t>)</a:t>
-            </a:r>
-            <a:endParaRPr lang="ko-KR" altLang="en-US" sz="1100" dirty="0"/>
-          </a:p>
-          <a:p>
-            <a:pPr>
-              <a:defRPr/>
-            </a:pPr>
-            <a:endParaRPr lang="ko-KR" altLang="en-US" sz="1100" dirty="0"/>
-          </a:p>
-          <a:p>
-            <a:pPr>
-              <a:defRPr/>
-            </a:pPr>
-            <a:r>
-              <a:rPr lang="en-US" altLang="ko-KR" sz="1100" b="1" dirty="0"/>
-              <a:t>② </a:t>
-            </a:r>
-            <a:r>
-              <a:rPr lang="ko-KR" altLang="en-US" sz="1100" b="1" dirty="0"/>
-              <a:t>개선내용</a:t>
-            </a:r>
-          </a:p>
-          <a:p>
-            <a:pPr marL="171450" indent="-171450">
-              <a:buFontTx/>
-              <a:buChar char="-"/>
-              <a:defRPr/>
-            </a:pPr>
-            <a:r>
-              <a:rPr lang="ko-KR" altLang="en-US" sz="1100" dirty="0"/>
-              <a:t>수작업 → 자동화 기반 실시간 데이터 파이프라인 전환</a:t>
-            </a:r>
-          </a:p>
-          <a:p>
-            <a:pPr marL="171450" indent="-171450">
-              <a:buFontTx/>
-              <a:buChar char="-"/>
-              <a:defRPr/>
-            </a:pPr>
-            <a:r>
-              <a:rPr lang="ko-KR" altLang="en-US" sz="1100" dirty="0"/>
-              <a:t>단순 기사 수집 → </a:t>
-            </a:r>
-            <a:r>
-              <a:rPr lang="en-US" altLang="ko-KR" sz="1100" dirty="0"/>
-              <a:t>AI </a:t>
-            </a:r>
-            <a:r>
-              <a:rPr lang="ko-KR" altLang="en-US" sz="1100" dirty="0"/>
-              <a:t>기반 의미 분석 및 인사이트 도출</a:t>
-            </a:r>
-          </a:p>
-          <a:p>
-            <a:pPr marL="171450" indent="-171450">
-              <a:buFontTx/>
-              <a:buChar char="-"/>
-              <a:defRPr/>
-            </a:pPr>
-            <a:r>
-              <a:rPr lang="ko-KR" altLang="en-US" sz="1100" dirty="0"/>
-              <a:t>개별 시스템 → 그룹 공통 플랫폼 통합</a:t>
-            </a:r>
-          </a:p>
-          <a:p>
-            <a:pPr marL="171450" indent="-171450">
-              <a:buFontTx/>
-              <a:buChar char="-"/>
-              <a:defRPr/>
-            </a:pPr>
-            <a:r>
-              <a:rPr lang="ko-KR" altLang="en-US" sz="1100" dirty="0"/>
-              <a:t>단편 정보 → 구조화된 데이터 자산 축적</a:t>
+              <a:t>애플리케이션 개발</a:t>
             </a:r>
             <a:br>
               <a:rPr lang="ko-KR" altLang="en-US" sz="1100" dirty="0"/>
             </a:br>
-            <a:endParaRPr lang="ko-KR" altLang="en-US" sz="1100" dirty="0"/>
-          </a:p>
-          <a:p>
-            <a:pPr>
-              <a:defRPr/>
-            </a:pPr>
-            <a:r>
-              <a:rPr lang="en-US" altLang="ko-KR" sz="1100" b="1" dirty="0"/>
-              <a:t>③ </a:t>
-            </a:r>
-            <a:r>
-              <a:rPr lang="ko-KR" altLang="en-US" sz="1100" b="1" dirty="0"/>
-              <a:t>기대효과</a:t>
-            </a:r>
-          </a:p>
-          <a:p>
-            <a:pPr marL="171450" indent="-171450">
-              <a:buFontTx/>
-              <a:buChar char="-"/>
-              <a:defRPr/>
-            </a:pPr>
+            <a:r>
+              <a:rPr lang="en-US" altLang="ko-KR" sz="1100" dirty="0"/>
+              <a:t>-</a:t>
+            </a:r>
             <a:r>
               <a:rPr lang="ko-KR" altLang="en-US" sz="1100" dirty="0"/>
-              <a:t>비용 절감 </a:t>
+              <a:t> 모듈</a:t>
             </a:r>
             <a:r>
               <a:rPr lang="en-US" altLang="ko-KR" sz="1100" dirty="0"/>
-              <a:t>: </a:t>
+              <a:t>1(</a:t>
             </a:r>
             <a:r>
               <a:rPr lang="ko-KR" altLang="en-US" sz="1100" dirty="0"/>
-              <a:t>중복 개발 제거 및 인력 투입 최소화</a:t>
-            </a:r>
-          </a:p>
-          <a:p>
-            <a:pPr marL="171450" indent="-171450">
-              <a:buFontTx/>
-              <a:buChar char="-"/>
-              <a:defRPr/>
-            </a:pPr>
+              <a:t>기자 분석</a:t>
+            </a:r>
+            <a:r>
+              <a:rPr lang="en-US" altLang="ko-KR" sz="1100" dirty="0"/>
+              <a:t>) : </a:t>
+            </a:r>
             <a:r>
               <a:rPr lang="ko-KR" altLang="en-US" sz="1100" dirty="0"/>
-              <a:t>업무 방식 전환 </a:t>
-            </a:r>
-            <a:r>
+              <a:t>기자와 </a:t>
+            </a:r>
+            <a:r>
+              <a:rPr lang="ko-KR" altLang="en-US" sz="1100" dirty="0" err="1"/>
+              <a:t>미팅시</a:t>
+            </a:r>
+            <a:r>
+              <a:rPr lang="ko-KR" altLang="en-US" sz="1100" dirty="0"/>
+              <a:t> 활용하기 위한 기자 정보 분석</a:t>
+            </a:r>
+            <a:br>
               <a:rPr lang="en-US" altLang="ko-KR" sz="1100" dirty="0"/>
-              <a:t>: </a:t>
+            </a:br>
+            <a:r>
+              <a:rPr lang="en-US" altLang="ko-KR" sz="1100" dirty="0"/>
+              <a:t>-</a:t>
             </a:r>
             <a:r>
               <a:rPr lang="ko-KR" altLang="en-US" sz="1100" dirty="0"/>
-              <a:t>반복 작업 감소 → 전략 중심 업무 집중</a:t>
-            </a:r>
-          </a:p>
-          <a:p>
-            <a:pPr marL="171450" indent="-171450">
-              <a:buFontTx/>
-              <a:buChar char="-"/>
-              <a:defRPr/>
-            </a:pPr>
+              <a:t> 모듈</a:t>
+            </a:r>
+            <a:r>
+              <a:rPr lang="en-US" altLang="ko-KR" sz="1100" dirty="0"/>
+              <a:t>2(</a:t>
+            </a:r>
             <a:r>
               <a:rPr lang="ko-KR" altLang="en-US" sz="1100" dirty="0"/>
-              <a:t>의사결정 속도 향상 </a:t>
+              <a:t>안전</a:t>
             </a:r>
             <a:r>
               <a:rPr lang="en-US" altLang="ko-KR" sz="1100" dirty="0"/>
-              <a:t>: </a:t>
+              <a:t>/</a:t>
             </a:r>
             <a:r>
               <a:rPr lang="ko-KR" altLang="en-US" sz="1100" dirty="0"/>
-              <a:t>실시간 이슈 대응 및 보고 체계 확보</a:t>
-            </a:r>
-          </a:p>
-          <a:p>
-            <a:pPr marL="171450" indent="-171450">
-              <a:buFontTx/>
-              <a:buChar char="-"/>
-              <a:defRPr/>
-            </a:pPr>
+              <a:t>노동 관련 대정부 업무 분석</a:t>
+            </a:r>
+            <a:r>
+              <a:rPr lang="en-US" altLang="ko-KR" sz="1100" dirty="0"/>
+              <a:t>) : </a:t>
+            </a:r>
             <a:r>
               <a:rPr lang="ko-KR" altLang="en-US" sz="1100" dirty="0"/>
-              <a:t>데이터 기반 홍보 강화 </a:t>
+              <a:t>안전</a:t>
             </a:r>
             <a:r>
               <a:rPr lang="en-US" altLang="ko-KR" sz="1100" dirty="0"/>
-              <a:t>: </a:t>
+              <a:t>/</a:t>
             </a:r>
             <a:r>
               <a:rPr lang="ko-KR" altLang="en-US" sz="1100" dirty="0"/>
-              <a:t>정량</a:t>
-            </a:r>
-            <a:r>
+              <a:t>노동 관련 대정부 업무를 위한 정보 분석</a:t>
+            </a:r>
+            <a:br>
               <a:rPr lang="en-US" altLang="ko-KR" sz="1100" dirty="0"/>
-              <a:t>·</a:t>
+            </a:br>
+            <a:r>
+              <a:rPr lang="en-US" altLang="ko-KR" sz="1100" dirty="0"/>
+              <a:t>-</a:t>
+            </a:r>
+            <a:r>
+              <a:rPr lang="ko-KR" altLang="en-US" sz="1100"/>
+              <a:t> 모듈</a:t>
+            </a:r>
+            <a:r>
+              <a:rPr lang="en-US" altLang="ko-KR" sz="1100" dirty="0"/>
+              <a:t>3(</a:t>
             </a:r>
             <a:r>
               <a:rPr lang="ko-KR" altLang="en-US" sz="1100" dirty="0"/>
-              <a:t>정성 분석 기반 메시지 관리</a:t>
-            </a:r>
-          </a:p>
-          <a:p>
-            <a:pPr marL="171450" indent="-171450">
-              <a:buFontTx/>
-              <a:buChar char="-"/>
-              <a:defRPr/>
-            </a:pPr>
+              <a:t>이슈 분석</a:t>
+            </a:r>
+            <a:r>
+              <a:rPr lang="en-US" altLang="ko-KR" sz="1100" dirty="0"/>
+              <a:t>) : </a:t>
+            </a:r>
             <a:r>
               <a:rPr lang="ko-KR" altLang="en-US" sz="1100" dirty="0"/>
-              <a:t>그룹 시너지 창출 </a:t>
-            </a:r>
-            <a:r>
+              <a:t>그룹사별 뉴스 이슈 분석</a:t>
+            </a:r>
+            <a:br>
               <a:rPr lang="en-US" altLang="ko-KR" sz="1100" dirty="0"/>
-              <a:t>: </a:t>
-            </a:r>
-            <a:r>
-              <a:rPr lang="ko-KR" altLang="en-US" sz="1100" dirty="0"/>
-              <a:t>통합 플랫폼 기반 일관된 대외 커뮤니케이션 구현</a:t>
+            </a:br>
+            <a:endParaRPr lang="en-US" altLang="ko-KR" sz="1100" dirty="0"/>
+          </a:p>
+          <a:p>
+            <a:r>
+              <a:rPr lang="ko-KR" altLang="ko-KR" sz="1100" b="1" dirty="0"/>
+              <a:t>③기대효과</a:t>
+            </a:r>
+          </a:p>
+          <a:p>
+            <a:r>
+              <a:rPr lang="ko-KR" altLang="ko-KR" sz="1100" dirty="0"/>
+              <a:t>통합 플랫폼 기반 업무 혁신을 통해 비용 절감, 전략 중심 업무 전환, 신속한 의사결정, 데이터 기반 홍보 강화 및 그룹 시너지 창출</a:t>
             </a:r>
           </a:p>
         </p:txBody>
@@ -5336,7 +5128,7 @@
           <p:nvPr>
             <p:extLst>
               <p:ext uri="{D42A27DB-BD31-4B8C-83A1-F6EECF244321}">
-                <p14:modId xmlns:p14="http://schemas.microsoft.com/office/powerpoint/2010/main" val="408943684"/>
+                <p14:modId xmlns:p14="http://schemas.microsoft.com/office/powerpoint/2010/main" val="1337828076"/>
               </p:ext>
             </p:extLst>
           </p:nvPr>
@@ -6174,16 +5966,32 @@
                         <a:tabLst/>
                         <a:defRPr/>
                       </a:pPr>
-                      <a:endParaRPr lang="ko-KR" altLang="en-US" sz="1100" b="0" dirty="0">
-                        <a:solidFill>
-                          <a:schemeClr val="tx1">
-                            <a:lumMod val="85000"/>
-                            <a:lumOff val="15000"/>
-                          </a:schemeClr>
-                        </a:solidFill>
-                        <a:latin typeface="+mn-ea"/>
-                        <a:ea typeface="+mn-ea"/>
-                      </a:endParaRPr>
+                      <a:r>
+                        <a:rPr lang="ko-KR" altLang="en-US" sz="1100" b="0" dirty="0" err="1">
+                          <a:solidFill>
+                            <a:schemeClr val="tx1">
+                              <a:lumMod val="85000"/>
+                              <a:lumOff val="15000"/>
+                            </a:schemeClr>
+                          </a:solidFill>
+                          <a:latin typeface="+mn-ea"/>
+                          <a:ea typeface="+mn-ea"/>
+                        </a:rPr>
+                        <a:t>김대광</a:t>
+                      </a:r>
+                      <a:r>
+                        <a:rPr lang="ko-KR" altLang="en-US" sz="1100" b="0" dirty="0">
+                          <a:solidFill>
+                            <a:schemeClr val="tx1">
+                              <a:lumMod val="85000"/>
+                              <a:lumOff val="15000"/>
+                            </a:schemeClr>
+                          </a:solidFill>
+                          <a:latin typeface="+mn-ea"/>
+                          <a:ea typeface="+mn-ea"/>
+                        </a:rPr>
+                        <a:t> 차장</a:t>
+                      </a:r>
                     </a:p>
                   </a:txBody>
                   <a:tcPr marL="0" marR="0" marT="36000" marB="36000" anchor="ctr">
